--- a/backend/app/domain/documents/templates/research-deck.pptx
+++ b/backend/app/domain/documents/templates/research-deck.pptx
@@ -3105,7 +3105,8 @@
         </p:nvSpPr>
         <p:spPr>
           <a:xfrm>
-            <a:ext cx="11277295" cy="0"/>
+            <a:off x="548640" y="2194560"/>
+            <a:ext cx="11094415" cy="1371600"/>
           </a:xfrm>
         </p:spPr>
         <p:txBody>
@@ -3128,7 +3129,12 @@
             <p:ph type="subTitle" idx="1"/>
           </p:nvPr>
         </p:nvSpPr>
-        <p:spPr/>
+        <p:spPr>
+          <a:xfrm>
+            <a:off x="548640" y="3749039"/>
+            <a:ext cx="11094415" cy="914400"/>
+          </a:xfrm>
+        </p:spPr>
         <p:txBody>
           <a:bodyPr/>
           <a:lstStyle/>
@@ -3169,7 +3175,8 @@
         </p:nvSpPr>
         <p:spPr>
           <a:xfrm>
-            <a:ext cx="11277295" cy="0"/>
+            <a:off x="548640" y="411480"/>
+            <a:ext cx="11094415" cy="914400"/>
           </a:xfrm>
         </p:spPr>
         <p:txBody>
@@ -3177,6 +3184,11 @@
           <a:lstStyle/>
           <a:p>
             <a:r>
+              <a:rPr sz="3200" b="1">
+                <a:solidFill>
+                  <a:srgbClr val="1F4E79"/>
+                </a:solidFill>
+              </a:rPr>
               <a:t>调研问题与方法</a:t>
             </a:r>
           </a:p>
@@ -3192,7 +3204,12 @@
             <p:ph idx="1"/>
           </p:nvPr>
         </p:nvSpPr>
-        <p:spPr/>
+        <p:spPr>
+          <a:xfrm>
+            <a:off x="548640" y="1554480"/>
+            <a:ext cx="11094415" cy="4754880"/>
+          </a:xfrm>
+        </p:spPr>
         <p:txBody>
           <a:bodyPr/>
           <a:lstStyle/>
@@ -3283,7 +3300,8 @@
         </p:nvSpPr>
         <p:spPr>
           <a:xfrm>
-            <a:ext cx="11277295" cy="0"/>
+            <a:off x="548640" y="411480"/>
+            <a:ext cx="11094415" cy="914400"/>
           </a:xfrm>
         </p:spPr>
         <p:txBody>
@@ -3291,6 +3309,11 @@
           <a:lstStyle/>
           <a:p>
             <a:r>
+              <a:rPr sz="3200" b="1">
+                <a:solidFill>
+                  <a:srgbClr val="1F4E79"/>
+                </a:solidFill>
+              </a:rPr>
               <a:t>主要发现</a:t>
             </a:r>
           </a:p>
@@ -3306,7 +3329,12 @@
             <p:ph idx="1"/>
           </p:nvPr>
         </p:nvSpPr>
-        <p:spPr/>
+        <p:spPr>
+          <a:xfrm>
+            <a:off x="548640" y="1554480"/>
+            <a:ext cx="11094415" cy="4754880"/>
+          </a:xfrm>
+        </p:spPr>
         <p:txBody>
           <a:bodyPr/>
           <a:lstStyle/>
@@ -3397,7 +3425,8 @@
         </p:nvSpPr>
         <p:spPr>
           <a:xfrm>
-            <a:ext cx="11277295" cy="0"/>
+            <a:off x="548640" y="411480"/>
+            <a:ext cx="11094415" cy="914400"/>
           </a:xfrm>
         </p:spPr>
         <p:txBody>
@@ -3405,6 +3434,11 @@
           <a:lstStyle/>
           <a:p>
             <a:r>
+              <a:rPr sz="3200" b="1">
+                <a:solidFill>
+                  <a:srgbClr val="1F4E79"/>
+                </a:solidFill>
+              </a:rPr>
               <a:t>对比与分析</a:t>
             </a:r>
           </a:p>
@@ -3420,7 +3454,12 @@
             <p:ph idx="1"/>
           </p:nvPr>
         </p:nvSpPr>
-        <p:spPr/>
+        <p:spPr>
+          <a:xfrm>
+            <a:off x="548640" y="1554480"/>
+            <a:ext cx="11094415" cy="4754880"/>
+          </a:xfrm>
+        </p:spPr>
         <p:txBody>
           <a:bodyPr/>
           <a:lstStyle/>
@@ -3505,7 +3544,8 @@
         </p:nvSpPr>
         <p:spPr>
           <a:xfrm>
-            <a:ext cx="11277295" cy="0"/>
+            <a:off x="548640" y="411480"/>
+            <a:ext cx="11094415" cy="914400"/>
           </a:xfrm>
         </p:spPr>
         <p:txBody>
@@ -3513,6 +3553,11 @@
           <a:lstStyle/>
           <a:p>
             <a:r>
+              <a:rPr sz="3200" b="1">
+                <a:solidFill>
+                  <a:srgbClr val="1F4E79"/>
+                </a:solidFill>
+              </a:rPr>
               <a:t>结论与建议</a:t>
             </a:r>
           </a:p>
@@ -3528,7 +3573,12 @@
             <p:ph idx="1"/>
           </p:nvPr>
         </p:nvSpPr>
-        <p:spPr/>
+        <p:spPr>
+          <a:xfrm>
+            <a:off x="548640" y="1554480"/>
+            <a:ext cx="11094415" cy="4754880"/>
+          </a:xfrm>
+        </p:spPr>
         <p:txBody>
           <a:bodyPr/>
           <a:lstStyle/>
@@ -3619,7 +3669,8 @@
         </p:nvSpPr>
         <p:spPr>
           <a:xfrm>
-            <a:ext cx="11277295" cy="0"/>
+            <a:off x="548640" y="411480"/>
+            <a:ext cx="11094415" cy="914400"/>
           </a:xfrm>
         </p:spPr>
         <p:txBody>
@@ -3627,6 +3678,11 @@
           <a:lstStyle/>
           <a:p>
             <a:r>
+              <a:rPr sz="3200" b="1">
+                <a:solidFill>
+                  <a:srgbClr val="1F4E79"/>
+                </a:solidFill>
+              </a:rPr>
               <a:t>参考来源</a:t>
             </a:r>
           </a:p>
@@ -3642,7 +3698,12 @@
             <p:ph idx="1"/>
           </p:nvPr>
         </p:nvSpPr>
-        <p:spPr/>
+        <p:spPr>
+          <a:xfrm>
+            <a:off x="548640" y="1554480"/>
+            <a:ext cx="11094415" cy="4754880"/>
+          </a:xfrm>
+        </p:spPr>
         <p:txBody>
           <a:bodyPr/>
           <a:lstStyle/>
